--- a/paper/AdaptiShield-Overview.pptx
+++ b/paper/AdaptiShield-Overview.pptx
@@ -3715,7 +3715,7 @@
             </a:avLst>
           </a:prstGeom>
           <a:solidFill>
-            <a:srgbClr val="1F5FA9"/>
+            <a:srgbClr val="2C7A5B"/>
           </a:solidFill>
           <a:ln>
             <a:noFill/>
@@ -3778,7 +3778,7 @@
                 </a:solidFill>
                 <a:latin typeface="Consolas"/>
               </a:rPr>
-              <a:t>RUNNING</a:t>
+              <a:t>DONE TODAY</a:t>
             </a:r>
           </a:p>
         </p:txBody>
@@ -3817,7 +3817,7 @@
                 </a:solidFill>
                 <a:latin typeface="Calibri"/>
               </a:rPr>
-              <a:t>One more measurement</a:t>
+              <a:t>The last measurement came back</a:t>
             </a:r>
           </a:p>
         </p:txBody>
@@ -3856,7 +3856,7 @@
                 </a:solidFill>
                 <a:latin typeface="Calibri"/>
               </a:rPr>
-              <a:t>In progress now. It makes the headline 96.7% → 18% result harder for a reviewer to challenge.</a:t>
+              <a:t>We re-ran the headline test three times. The strong half scored 96.7% every time, the weak half 10-13%. An 86-point gap against a one-document wobble — the result is solid.</a:t>
             </a:r>
           </a:p>
         </p:txBody>
@@ -7849,7 +7849,7 @@
                 </a:solidFill>
                 <a:latin typeface="Consolas"/>
               </a:rPr>
-              <a:t>90%</a:t>
+              <a:t>95%</a:t>
             </a:r>
           </a:p>
         </p:txBody>
@@ -7907,7 +7907,7 @@
         <p:spPr>
           <a:xfrm>
             <a:off x="822960" y="3694176"/>
-            <a:ext cx="6254496" cy="118872"/>
+            <a:ext cx="6601968" cy="118872"/>
           </a:xfrm>
           <a:prstGeom prst="rect">
             <a:avLst/>
@@ -7976,7 +7976,7 @@
                 </a:solidFill>
                 <a:latin typeface="Calibri"/>
               </a:rPr>
-              <a:t>Fifteen phases of testing, all finished. One last measurement is running now.</a:t>
+              <a:t>Fifteen phases of testing, all finished — including the last checks, back today.</a:t>
             </a:r>
           </a:p>
         </p:txBody>
@@ -8266,7 +8266,7 @@
                 </a:solidFill>
                 <a:latin typeface="Georgia"/>
               </a:rPr>
-              <a:t>≈80%</a:t>
+              <a:t>≈82%</a:t>
             </a:r>
           </a:p>
         </p:txBody>
@@ -9775,7 +9775,7 @@
                 </a:solidFill>
                 <a:latin typeface="Calibri"/>
               </a:rPr>
-              <a:t>All nine sections drafted.</a:t>
+              <a:t>All nine sections drafted. All measurements in.</a:t>
             </a:r>
           </a:p>
         </p:txBody>
